--- a/SQL WORLD ENERGY ANALYSIS.pptx
+++ b/SQL WORLD ENERGY ANALYSIS.pptx
@@ -16949,7 +16949,7 @@
               <a:rPr lang="en-US" sz="2000" b="1" dirty="0">
                 <a:latin typeface="Lucida Fax" panose="02060602050505020204" pitchFamily="18" charset="0"/>
               </a:rPr>
-              <a:t>How has population growth affected total emissions in each country?</a:t>
+              <a:t>How has population growth affected total emissions of top 5 countries?</a:t>
             </a:r>
             <a:endParaRPr lang="en-IN" sz="2000" b="1" u="sng" dirty="0">
               <a:latin typeface="Lucida Fax" panose="02060602050505020204" pitchFamily="18" charset="0"/>
@@ -17807,7 +17807,7 @@
                 <a:latin typeface="Arial" panose="020B0604020202020204" pitchFamily="34" charset="0"/>
                 <a:cs typeface="Arial" panose="020B0604020202020204" pitchFamily="34" charset="0"/>
               </a:rPr>
-              <a:t>About ne</a:t>
+              <a:t>About me</a:t>
             </a:r>
           </a:p>
         </p:txBody>
